--- a/slides-1-first-photo.pptx
+++ b/slides-1-first-photo.pptx
@@ -19,6 +19,7 @@
     <p:sldId id="265" r:id="rId10"/>
     <p:sldId id="268" r:id="rId11"/>
     <p:sldId id="266" r:id="rId12"/>
+    <p:sldId id="269" r:id="rId19"/>
     <p:sldId id="267" r:id="rId13"/>
   </p:sldIdLst>
   <p:sldSz cx="12192000" cy="6858000"/>
@@ -3433,6 +3434,537 @@
 
 <file path=ppt/slides/slide12.xml><?xml version="1.0" encoding="utf-8"?>
 <p:sld xmlns:a="http://schemas.openxmlformats.org/drawingml/2006/main" xmlns:r="http://schemas.openxmlformats.org/officeDocument/2006/relationships" xmlns:p="http://schemas.openxmlformats.org/presentationml/2006/main">
+  <p:cSld name="Slide 4">
+    <p:bg>
+      <p:bgPr>
+        <a:solidFill>
+          <a:srgbClr val="070B14"/>
+        </a:solidFill>
+        <a:effectLst/>
+      </p:bgPr>
+    </p:bg>
+    <p:spTree>
+      <p:nvGrpSpPr>
+        <p:cNvPr id="1" name=""/>
+        <p:cNvGrpSpPr/>
+        <p:nvPr/>
+      </p:nvGrpSpPr>
+      <p:grpSpPr>
+        <a:xfrm>
+          <a:off x="0" y="0"/>
+          <a:ext cx="0" cy="0"/>
+          <a:chOff x="0" y="0"/>
+          <a:chExt cx="0" cy="0"/>
+        </a:xfrm>
+      </p:grpSpPr>
+      <p:sp>
+        <p:nvSpPr>
+          <p:cNvPr id="2" name="Shape 0"/>
+          <p:cNvSpPr/>
+          <p:nvPr/>
+        </p:nvSpPr>
+        <p:spPr>
+          <a:xfrm>
+            <a:off x="1097280" y="822960"/>
+            <a:ext cx="32004" cy="32004"/>
+          </a:xfrm>
+          <a:prstGeom prst="ellipse">
+            <a:avLst/>
+          </a:prstGeom>
+          <a:solidFill>
+            <a:srgbClr val="FFFFFF">
+              <a:alpha val="45000"/>
+            </a:srgbClr>
+          </a:solidFill>
+          <a:ln/>
+        </p:spPr>
+      </p:sp>
+      <p:sp>
+        <p:nvSpPr>
+          <p:cNvPr id="3" name="Shape 1"/>
+          <p:cNvSpPr/>
+          <p:nvPr/>
+        </p:nvSpPr>
+        <p:spPr>
+          <a:xfrm>
+            <a:off x="3108960" y="6217920"/>
+            <a:ext cx="32004" cy="32004"/>
+          </a:xfrm>
+          <a:prstGeom prst="ellipse">
+            <a:avLst/>
+          </a:prstGeom>
+          <a:solidFill>
+            <a:srgbClr val="FFFFFF">
+              <a:alpha val="45000"/>
+            </a:srgbClr>
+          </a:solidFill>
+          <a:ln/>
+        </p:spPr>
+      </p:sp>
+      <p:sp>
+        <p:nvSpPr>
+          <p:cNvPr id="4" name="Shape 2"/>
+          <p:cNvSpPr/>
+          <p:nvPr/>
+        </p:nvSpPr>
+        <p:spPr>
+          <a:xfrm>
+            <a:off x="6035040" y="548640"/>
+            <a:ext cx="32004" cy="32004"/>
+          </a:xfrm>
+          <a:prstGeom prst="ellipse">
+            <a:avLst/>
+          </a:prstGeom>
+          <a:solidFill>
+            <a:srgbClr val="FFFFFF">
+              <a:alpha val="45000"/>
+            </a:srgbClr>
+          </a:solidFill>
+          <a:ln/>
+        </p:spPr>
+      </p:sp>
+      <p:sp>
+        <p:nvSpPr>
+          <p:cNvPr id="5" name="Shape 3"/>
+          <p:cNvSpPr/>
+          <p:nvPr/>
+        </p:nvSpPr>
+        <p:spPr>
+          <a:xfrm>
+            <a:off x="8961120" y="6309360"/>
+            <a:ext cx="32004" cy="32004"/>
+          </a:xfrm>
+          <a:prstGeom prst="ellipse">
+            <a:avLst/>
+          </a:prstGeom>
+          <a:solidFill>
+            <a:srgbClr val="FFFFFF">
+              <a:alpha val="45000"/>
+            </a:srgbClr>
+          </a:solidFill>
+          <a:ln/>
+        </p:spPr>
+      </p:sp>
+      <p:sp>
+        <p:nvSpPr>
+          <p:cNvPr id="6" name="Shape 4"/>
+          <p:cNvSpPr/>
+          <p:nvPr/>
+        </p:nvSpPr>
+        <p:spPr>
+          <a:xfrm>
+            <a:off x="11338560" y="1097280"/>
+            <a:ext cx="32004" cy="32004"/>
+          </a:xfrm>
+          <a:prstGeom prst="ellipse">
+            <a:avLst/>
+          </a:prstGeom>
+          <a:solidFill>
+            <a:srgbClr val="FFFFFF">
+              <a:alpha val="45000"/>
+            </a:srgbClr>
+          </a:solidFill>
+          <a:ln/>
+        </p:spPr>
+      </p:sp>
+      <p:sp>
+        <p:nvSpPr>
+          <p:cNvPr id="7" name="Shape 5"/>
+          <p:cNvSpPr/>
+          <p:nvPr/>
+        </p:nvSpPr>
+        <p:spPr>
+          <a:xfrm>
+            <a:off x="10607040" y="4937760"/>
+            <a:ext cx="32004" cy="32004"/>
+          </a:xfrm>
+          <a:prstGeom prst="ellipse">
+            <a:avLst/>
+          </a:prstGeom>
+          <a:solidFill>
+            <a:srgbClr val="FFFFFF">
+              <a:alpha val="45000"/>
+            </a:srgbClr>
+          </a:solidFill>
+          <a:ln/>
+        </p:spPr>
+      </p:sp>
+      <p:sp>
+        <p:nvSpPr>
+          <p:cNvPr id="8" name="Shape 6"/>
+          <p:cNvSpPr/>
+          <p:nvPr/>
+        </p:nvSpPr>
+        <p:spPr>
+          <a:xfrm>
+            <a:off x="640080" y="4480560"/>
+            <a:ext cx="32004" cy="32004"/>
+          </a:xfrm>
+          <a:prstGeom prst="ellipse">
+            <a:avLst/>
+          </a:prstGeom>
+          <a:solidFill>
+            <a:srgbClr val="FFFFFF">
+              <a:alpha val="45000"/>
+            </a:srgbClr>
+          </a:solidFill>
+          <a:ln/>
+        </p:spPr>
+      </p:sp>
+      <p:sp>
+        <p:nvSpPr>
+          <p:cNvPr id="9" name="Shape 7"/>
+          <p:cNvSpPr/>
+          <p:nvPr/>
+        </p:nvSpPr>
+        <p:spPr>
+          <a:xfrm>
+            <a:off x="4754880" y="6446520"/>
+            <a:ext cx="32004" cy="32004"/>
+          </a:xfrm>
+          <a:prstGeom prst="ellipse">
+            <a:avLst/>
+          </a:prstGeom>
+          <a:solidFill>
+            <a:srgbClr val="FFFFFF">
+              <a:alpha val="45000"/>
+            </a:srgbClr>
+          </a:solidFill>
+          <a:ln/>
+        </p:spPr>
+      </p:sp>
+      <p:sp>
+        <p:nvSpPr>
+          <p:cNvPr id="10" name="Text 8"/>
+          <p:cNvSpPr/>
+          <p:nvPr/>
+        </p:nvSpPr>
+        <p:spPr>
+          <a:xfrm>
+            <a:off x="640080" y="502920"/>
+            <a:ext cx="10972800" cy="640080"/>
+          </a:xfrm>
+          <a:prstGeom prst="rect">
+            <a:avLst/>
+          </a:prstGeom>
+          <a:noFill/>
+          <a:ln/>
+        </p:spPr>
+        <p:txBody>
+          <a:bodyPr wrap="square" rtlCol="0" anchor="ctr"/>
+          <a:lstStyle/>
+          <a:p>
+            <a:pPr marL="0" indent="0">
+              <a:buNone/>
+            </a:pPr>
+            <a:r>
+              <a:rPr lang="en-US" sz="3000" b="1" dirty="0">
+                <a:solidFill>
+                  <a:srgbClr val="FFB347"/>
+                </a:solidFill>
+                <a:latin typeface="Microsoft JhengHei" pitchFamily="34" charset="0"/>
+                <a:ea typeface="Microsoft JhengHei" pitchFamily="34" charset="-122"/>
+                <a:cs typeface="Microsoft JhengHei" pitchFamily="34" charset="-120"/>
+              </a:rPr>
+              <a:t>🔍 </a:t>
+            </a:r>
+            <a:r>
+              <a:rPr lang="zh-TW" altLang="en-US" sz="3000" b="1" dirty="0" smtClean="0">
+                <a:solidFill>
+                  <a:srgbClr val="FFB347"/>
+                </a:solidFill>
+                <a:latin typeface="Microsoft JhengHei" pitchFamily="34" charset="0"/>
+                <a:ea typeface="Microsoft JhengHei" pitchFamily="34" charset="-122"/>
+                <a:cs typeface="Microsoft JhengHei" pitchFamily="34" charset="-120"/>
+              </a:rPr>
+              <a:t>綜合活動：照片放大實驗</a:t>
+            </a:r>
+            <a:endParaRPr lang="en-US" sz="3000" dirty="0"/>
+          </a:p>
+        </p:txBody>
+      </p:sp>
+      <p:sp>
+        <p:nvSpPr>
+          <p:cNvPr id="11" name="Text 9"/>
+          <p:cNvSpPr/>
+          <p:nvPr/>
+        </p:nvSpPr>
+        <p:spPr>
+          <a:xfrm>
+            <a:off x="640080" y="1554480"/>
+            <a:ext cx="10972800" cy="548640"/>
+          </a:xfrm>
+          <a:prstGeom prst="rect">
+            <a:avLst/>
+          </a:prstGeom>
+          <a:noFill/>
+          <a:ln/>
+        </p:spPr>
+        <p:txBody>
+          <a:bodyPr wrap="square" rtlCol="0" anchor="ctr"/>
+          <a:lstStyle/>
+          <a:p>
+            <a:pPr marL="0" indent="0" algn="ctr">
+              <a:buNone/>
+            </a:pPr>
+            <a:r>
+              <a:rPr lang="zh-TW" altLang="en-US" sz="2600" dirty="0" smtClean="0">
+                <a:solidFill>
+                  <a:srgbClr val="C9D6E8"/>
+                </a:solidFill>
+                <a:latin typeface="Microsoft JhengHei" pitchFamily="34" charset="0"/>
+                <a:ea typeface="Microsoft JhengHei" pitchFamily="34" charset="-122"/>
+                <a:cs typeface="Microsoft JhengHei" pitchFamily="34" charset="-120"/>
+              </a:rPr>
+              <a:t>放大、再放大——和「相機會挑重點記嗎？」一起想</a:t>
+            </a:r>
+            <a:endParaRPr lang="en-US" sz="2600" dirty="0"/>
+          </a:p>
+        </p:txBody>
+      </p:sp>
+      <p:sp>
+        <p:nvSpPr>
+          <p:cNvPr id="12" name="Text 10"/>
+          <p:cNvSpPr/>
+          <p:nvPr/>
+        </p:nvSpPr>
+        <p:spPr>
+          <a:xfrm>
+            <a:off x="640080" y="2286000"/>
+            <a:ext cx="10972800" cy="914400"/>
+          </a:xfrm>
+          <a:prstGeom prst="rect">
+            <a:avLst/>
+          </a:prstGeom>
+          <a:noFill/>
+          <a:ln/>
+        </p:spPr>
+        <p:txBody>
+          <a:bodyPr wrap="square" rtlCol="0" anchor="ctr"/>
+          <a:lstStyle/>
+          <a:p>
+            <a:pPr algn="ctr"/>
+            <a:r>
+              <a:rPr lang="zh-TW" altLang="en-US" sz="4000" b="1" dirty="0" smtClean="0">
+                <a:solidFill>
+                  <a:srgbClr val="F2E3C8"/>
+                </a:solidFill>
+                <a:latin typeface="Microsoft JhengHei" pitchFamily="34" charset="0"/>
+                <a:ea typeface="Microsoft JhengHei" pitchFamily="34" charset="-122"/>
+                <a:cs typeface="Microsoft JhengHei" pitchFamily="34" charset="-120"/>
+              </a:rPr>
+              <a:t>放大後看到的格子，</a:t>
+            </a:r>
+            <a:r>
+              <a:rPr lang="zh-TW" altLang="en-US" sz="4000" b="1" dirty="0">
+                <a:solidFill>
+                  <a:srgbClr val="F2E3C8"/>
+                </a:solidFill>
+                <a:latin typeface="Microsoft JhengHei" pitchFamily="34" charset="0"/>
+                <a:ea typeface="Microsoft JhengHei" pitchFamily="34" charset="-122"/>
+                <a:cs typeface="Microsoft JhengHei" pitchFamily="34" charset="-120"/>
+              </a:rPr>
+              <a:t>有哪一格是相機覺得不重要、就沒記的</a:t>
+            </a:r>
+            <a:r>
+              <a:rPr lang="zh-TW" altLang="en-US" sz="4000" b="1" dirty="0" smtClean="0">
+                <a:solidFill>
+                  <a:srgbClr val="F2E3C8"/>
+                </a:solidFill>
+                <a:latin typeface="Microsoft JhengHei" pitchFamily="34" charset="0"/>
+                <a:ea typeface="Microsoft JhengHei" pitchFamily="34" charset="-122"/>
+                <a:cs typeface="Microsoft JhengHei" pitchFamily="34" charset="-120"/>
+              </a:rPr>
+              <a:t>？</a:t>
+            </a:r>
+            <a:endParaRPr lang="zh-TW" altLang="en-US" sz="4000" b="1" dirty="0">
+              <a:solidFill>
+                <a:srgbClr val="F2E3C8"/>
+              </a:solidFill>
+              <a:latin typeface="Microsoft JhengHei" pitchFamily="34" charset="0"/>
+              <a:ea typeface="Microsoft JhengHei" pitchFamily="34" charset="-122"/>
+              <a:cs typeface="Microsoft JhengHei" pitchFamily="34" charset="-120"/>
+            </a:endParaRPr>
+          </a:p>
+        </p:txBody>
+      </p:sp>
+      <p:sp>
+        <p:nvSpPr>
+          <p:cNvPr id="13" name="Shape 11"/>
+          <p:cNvSpPr/>
+          <p:nvPr/>
+        </p:nvSpPr>
+        <p:spPr>
+          <a:xfrm>
+            <a:off x="2194560" y="3657600"/>
+            <a:ext cx="7799832" cy="1920240"/>
+          </a:xfrm>
+          <a:prstGeom prst="rect">
+            <a:avLst/>
+          </a:prstGeom>
+          <a:solidFill>
+            <a:srgbClr val="0D1424"/>
+          </a:solidFill>
+          <a:ln w="19050">
+            <a:solidFill>
+              <a:srgbClr val="1E3A5C"/>
+            </a:solidFill>
+            <a:prstDash val="solid"/>
+          </a:ln>
+        </p:spPr>
+      </p:sp>
+      <p:sp>
+        <p:nvSpPr>
+          <p:cNvPr id="14" name="Text 12"/>
+          <p:cNvSpPr/>
+          <p:nvPr/>
+        </p:nvSpPr>
+        <p:spPr>
+          <a:xfrm>
+            <a:off x="2468880" y="3886200"/>
+            <a:ext cx="7251192" cy="1463040"/>
+          </a:xfrm>
+          <a:prstGeom prst="rect">
+            <a:avLst/>
+          </a:prstGeom>
+          <a:noFill/>
+          <a:ln/>
+        </p:spPr>
+        <p:txBody>
+          <a:bodyPr wrap="square" rtlCol="0" anchor="ctr"/>
+          <a:lstStyle/>
+          <a:p>
+            <a:pPr marL="0" indent="0" algn="ctr">
+              <a:lnSpc>
+                <a:spcPts val="2800"/>
+              </a:lnSpc>
+              <a:buNone/>
+            </a:pPr>
+            <a:r>
+              <a:rPr lang="en-US" sz="2000" b="1" dirty="0">
+                <a:solidFill>
+                  <a:srgbClr val="5EC8F2"/>
+                </a:solidFill>
+                <a:latin typeface="Microsoft JhengHei" pitchFamily="34" charset="0"/>
+                <a:ea typeface="Microsoft JhengHei" pitchFamily="34" charset="-122"/>
+                <a:cs typeface="Microsoft JhengHei" pitchFamily="34" charset="-120"/>
+              </a:rPr>
+              <a:t>平板實驗 3 分鐘
+</a:t>
+            </a:r>
+            <a:r>
+              <a:rPr lang="en-US" sz="1600" dirty="0" err="1">
+                <a:solidFill>
+                  <a:srgbClr val="C9D6E8"/>
+                </a:solidFill>
+                <a:latin typeface="Microsoft JhengHei" pitchFamily="34" charset="0"/>
+                <a:ea typeface="Microsoft JhengHei" pitchFamily="34" charset="-122"/>
+                <a:cs typeface="Microsoft JhengHei" pitchFamily="34" charset="-120"/>
+              </a:rPr>
+              <a:t>做法</a:t>
+            </a:r>
+            <a:r>
+              <a:rPr lang="en-US" sz="1600" dirty="0" smtClean="0">
+                <a:solidFill>
+                  <a:srgbClr val="C9D6E8"/>
+                </a:solidFill>
+                <a:latin typeface="Microsoft JhengHei" pitchFamily="34" charset="0"/>
+                <a:ea typeface="Microsoft JhengHei" pitchFamily="34" charset="-122"/>
+                <a:cs typeface="Microsoft JhengHei" pitchFamily="34" charset="-120"/>
+              </a:rPr>
+              <a:t>：</a:t>
+            </a:r>
+            <a:r>
+              <a:rPr lang="zh-TW" altLang="en-US" sz="1600" dirty="0" smtClean="0">
+                <a:solidFill>
+                  <a:srgbClr val="C9D6E8"/>
+                </a:solidFill>
+                <a:latin typeface="Microsoft JhengHei" pitchFamily="34" charset="0"/>
+                <a:ea typeface="Microsoft JhengHei" pitchFamily="34" charset="-122"/>
+                <a:cs typeface="Microsoft JhengHei" pitchFamily="34" charset="-120"/>
+              </a:rPr>
+              <a:t>把平板上的範例照片不斷放大，直到看見一格一格的色塊，逐格檢查。</a:t>
+            </a:r>
+            <a:endParaRPr lang="en-US" altLang="zh-TW" sz="1600" dirty="0" smtClean="0">
+              <a:solidFill>
+                <a:srgbClr val="C9D6E8"/>
+              </a:solidFill>
+              <a:latin typeface="Microsoft JhengHei" pitchFamily="34" charset="0"/>
+              <a:ea typeface="Microsoft JhengHei" pitchFamily="34" charset="-122"/>
+              <a:cs typeface="Microsoft JhengHei" pitchFamily="34" charset="-120"/>
+            </a:endParaRPr>
+          </a:p>
+          <a:p>
+            <a:pPr marL="0" indent="0">
+              <a:lnSpc>
+                <a:spcPts val="2800"/>
+              </a:lnSpc>
+              <a:buNone/>
+            </a:pPr>
+            <a:r>
+              <a:rPr lang="zh-TW" altLang="en-US" sz="1600" dirty="0" smtClean="0">
+                <a:solidFill>
+                  <a:srgbClr val="C9D6E8"/>
+                </a:solidFill>
+                <a:latin typeface="Microsoft JhengHei" pitchFamily="34" charset="0"/>
+                <a:ea typeface="Microsoft JhengHei" pitchFamily="34" charset="-122"/>
+                <a:cs typeface="Microsoft JhengHei" pitchFamily="34" charset="-120"/>
+              </a:rPr>
+              <a:t>發現：找不到缺格！相機不挑重點、逐格忠實記錄——正是掃描紀錄卡的規則，也是維京一號做的事。</a:t>
+            </a:r>
+            <a:endParaRPr lang="en-US" sz="2000" dirty="0"/>
+          </a:p>
+        </p:txBody>
+      </p:sp>
+      <p:sp>
+        <p:nvSpPr>
+          <p:cNvPr id="15" name="Text 13"/>
+          <p:cNvSpPr/>
+          <p:nvPr/>
+        </p:nvSpPr>
+        <p:spPr>
+          <a:xfrm>
+            <a:off x="457200" y="6473952"/>
+            <a:ext cx="11274552" cy="274320"/>
+          </a:xfrm>
+          <a:prstGeom prst="rect">
+            <a:avLst/>
+          </a:prstGeom>
+          <a:noFill/>
+          <a:ln/>
+        </p:spPr>
+        <p:txBody>
+          <a:bodyPr wrap="square" rtlCol="0" anchor="ctr"/>
+          <a:lstStyle/>
+          <a:p>
+            <a:pPr marL="0" indent="0" algn="ctr">
+              <a:buNone/>
+            </a:pPr>
+            <a:r>
+              <a:rPr lang="en-US" sz="900" dirty="0">
+                <a:solidFill>
+                  <a:srgbClr val="7A93AE"/>
+                </a:solidFill>
+                <a:latin typeface="Microsoft JhengHei" pitchFamily="34" charset="0"/>
+                <a:ea typeface="Microsoft JhengHei" pitchFamily="34" charset="-122"/>
+                <a:cs typeface="Microsoft JhengHei" pitchFamily="34" charset="-120"/>
+              </a:rPr>
+              <a:t>MISSION 01 · 火星第一眼：1976 維京一號的拍照任務　12</a:t>
+            </a:r>
+            <a:endParaRPr lang="en-US" sz="900" dirty="0"/>
+          </a:p>
+        </p:txBody>
+      </p:sp>
+    </p:spTree>
+  </p:cSld>
+  <p:clrMapOvr>
+    <a:masterClrMapping/>
+  </p:clrMapOvr>
+</p:sld>
+</file>
+
+<file path=ppt/slides/slide13.xml><?xml version="1.0" encoding="utf-8"?>
+<p:sld xmlns:a="http://schemas.openxmlformats.org/drawingml/2006/main" xmlns:r="http://schemas.openxmlformats.org/officeDocument/2006/relationships" xmlns:p="http://schemas.openxmlformats.org/presentationml/2006/main">
   <p:cSld name="Slide 12">
     <p:bg>
       <p:bgPr>

--- a/slides-1-first-photo.pptx
+++ b/slides-1-first-photo.pptx
@@ -5,7 +5,7 @@
     <p:sldMasterId id="2147483648" r:id="rId1"/>
   </p:sldMasterIdLst>
   <p:notesMasterIdLst>
-    <p:notesMasterId r:id="rId14"/>
+    <p:notesMasterId r:id="rId15"/>
   </p:notesMasterIdLst>
   <p:sldIdLst>
     <p:sldId id="256" r:id="rId2"/>
@@ -19,8 +19,8 @@
     <p:sldId id="265" r:id="rId10"/>
     <p:sldId id="268" r:id="rId11"/>
     <p:sldId id="266" r:id="rId12"/>
-    <p:sldId id="269" r:id="rId19"/>
-    <p:sldId id="267" r:id="rId13"/>
+    <p:sldId id="269" r:id="rId13"/>
+    <p:sldId id="267" r:id="rId14"/>
   </p:sldIdLst>
   <p:sldSz cx="12192000" cy="6858000"/>
   <p:notesSz cx="6858000" cy="12192000"/>
@@ -566,7 +566,7 @@
           <a:p>
             <a:fld id="{F7021451-1387-4CA6-816F-3879F97B5CBC}" type="slidenum">
               <a:rPr lang="en-US"/>
-              <a:t>12</a:t>
+              <a:t>13</a:t>
             </a:fld>
             <a:endParaRPr lang="en-US"/>
           </a:p>
@@ -3841,7 +3841,7 @@
               <a:buNone/>
             </a:pPr>
             <a:r>
-              <a:rPr lang="en-US" sz="2000" b="1" dirty="0">
+              <a:rPr lang="zh-TW" altLang="en-US" sz="2000" b="1" dirty="0" smtClean="0">
                 <a:solidFill>
                   <a:srgbClr val="5EC8F2"/>
                 </a:solidFill>
@@ -3849,11 +3849,26 @@
                 <a:ea typeface="Microsoft JhengHei" pitchFamily="34" charset="-122"/>
                 <a:cs typeface="Microsoft JhengHei" pitchFamily="34" charset="-120"/>
               </a:rPr>
-              <a:t>平板實驗 3 分鐘
-</a:t>
-            </a:r>
-            <a:r>
-              <a:rPr lang="en-US" sz="1600" dirty="0" err="1">
+              <a:t>照片放大實驗</a:t>
+            </a:r>
+            <a:endParaRPr lang="en-US" altLang="zh-TW" sz="2000" b="1" smtClean="0">
+              <a:solidFill>
+                <a:srgbClr val="5EC8F2"/>
+              </a:solidFill>
+              <a:latin typeface="Microsoft JhengHei" pitchFamily="34" charset="0"/>
+              <a:ea typeface="Microsoft JhengHei" pitchFamily="34" charset="-122"/>
+              <a:cs typeface="Microsoft JhengHei" pitchFamily="34" charset="-120"/>
+            </a:endParaRPr>
+          </a:p>
+          <a:p>
+            <a:pPr marL="0" indent="0">
+              <a:lnSpc>
+                <a:spcPts val="2800"/>
+              </a:lnSpc>
+              <a:buNone/>
+            </a:pPr>
+            <a:r>
+              <a:rPr lang="en-US" sz="1600" smtClean="0">
                 <a:solidFill>
                   <a:srgbClr val="C9D6E8"/>
                 </a:solidFill>
@@ -3883,7 +3898,29 @@
                 <a:ea typeface="Microsoft JhengHei" pitchFamily="34" charset="-122"/>
                 <a:cs typeface="Microsoft JhengHei" pitchFamily="34" charset="-120"/>
               </a:rPr>
-              <a:t>把平板上的範例照片不斷放大，直到看見一格一格的色塊，逐格檢查。</a:t>
+              <a:t>掃描右邊的工具，將範例</a:t>
+            </a:r>
+            <a:r>
+              <a:rPr lang="zh-TW" altLang="en-US" sz="1600" dirty="0" smtClean="0">
+                <a:solidFill>
+                  <a:srgbClr val="C9D6E8"/>
+                </a:solidFill>
+                <a:latin typeface="Microsoft JhengHei" pitchFamily="34" charset="0"/>
+                <a:ea typeface="Microsoft JhengHei" pitchFamily="34" charset="-122"/>
+                <a:cs typeface="Microsoft JhengHei" pitchFamily="34" charset="-120"/>
+              </a:rPr>
+              <a:t>照片不斷放大，直到看見一格一格的色</a:t>
+            </a:r>
+            <a:r>
+              <a:rPr lang="zh-TW" altLang="en-US" sz="1600" dirty="0" smtClean="0">
+                <a:solidFill>
+                  <a:srgbClr val="C9D6E8"/>
+                </a:solidFill>
+                <a:latin typeface="Microsoft JhengHei" pitchFamily="34" charset="0"/>
+                <a:ea typeface="Microsoft JhengHei" pitchFamily="34" charset="-122"/>
+                <a:cs typeface="Microsoft JhengHei" pitchFamily="34" charset="-120"/>
+              </a:rPr>
+              <a:t>塊。</a:t>
             </a:r>
             <a:endParaRPr lang="en-US" altLang="zh-TW" sz="1600" dirty="0" smtClean="0">
               <a:solidFill>
@@ -3910,7 +3947,40 @@
                 <a:ea typeface="Microsoft JhengHei" pitchFamily="34" charset="-122"/>
                 <a:cs typeface="Microsoft JhengHei" pitchFamily="34" charset="-120"/>
               </a:rPr>
-              <a:t>發現：找不到缺格！相機不挑重點、逐格忠實記錄——正是掃描紀錄卡的規則，也是維京一號做的事。</a:t>
+              <a:t>你會發現</a:t>
+            </a:r>
+            <a:r>
+              <a:rPr lang="zh-TW" altLang="en-US" sz="1600" dirty="0" smtClean="0">
+                <a:solidFill>
+                  <a:srgbClr val="C9D6E8"/>
+                </a:solidFill>
+                <a:latin typeface="Microsoft JhengHei" pitchFamily="34" charset="0"/>
+                <a:ea typeface="Microsoft JhengHei" pitchFamily="34" charset="-122"/>
+                <a:cs typeface="Microsoft JhengHei" pitchFamily="34" charset="-120"/>
+              </a:rPr>
+              <a:t>：找不到缺格！相機不挑重點、逐格忠實</a:t>
+            </a:r>
+            <a:r>
+              <a:rPr lang="zh-TW" altLang="en-US" sz="1600" dirty="0" smtClean="0">
+                <a:solidFill>
+                  <a:srgbClr val="C9D6E8"/>
+                </a:solidFill>
+                <a:latin typeface="Microsoft JhengHei" pitchFamily="34" charset="0"/>
+                <a:ea typeface="Microsoft JhengHei" pitchFamily="34" charset="-122"/>
+                <a:cs typeface="Microsoft JhengHei" pitchFamily="34" charset="-120"/>
+              </a:rPr>
+              <a:t>記錄正是</a:t>
+            </a:r>
+            <a:r>
+              <a:rPr lang="zh-TW" altLang="en-US" sz="1600" dirty="0" smtClean="0">
+                <a:solidFill>
+                  <a:srgbClr val="C9D6E8"/>
+                </a:solidFill>
+                <a:latin typeface="Microsoft JhengHei" pitchFamily="34" charset="0"/>
+                <a:ea typeface="Microsoft JhengHei" pitchFamily="34" charset="-122"/>
+                <a:cs typeface="Microsoft JhengHei" pitchFamily="34" charset="-120"/>
+              </a:rPr>
+              <a:t>掃描紀錄卡的規則，也是維京一號做的事。</a:t>
             </a:r>
             <a:endParaRPr lang="en-US" sz="2000" dirty="0"/>
           </a:p>
@@ -3955,6 +4025,36 @@
           </a:p>
         </p:txBody>
       </p:sp>
+      <p:pic>
+        <p:nvPicPr>
+          <p:cNvPr id="19" name="圖片 18"/>
+          <p:cNvPicPr>
+            <a:picLocks noChangeAspect="1"/>
+          </p:cNvPicPr>
+          <p:nvPr/>
+        </p:nvPicPr>
+        <p:blipFill>
+          <a:blip r:embed="rId2">
+            <a:extLst>
+              <a:ext uri="{28A0092B-C50C-407E-A947-70E740481C1C}">
+                <a14:useLocalDpi xmlns:a14="http://schemas.microsoft.com/office/drawing/2010/main" val="0"/>
+              </a:ext>
+            </a:extLst>
+          </a:blip>
+          <a:stretch>
+            <a:fillRect/>
+          </a:stretch>
+        </p:blipFill>
+        <p:spPr>
+          <a:xfrm>
+            <a:off x="271914" y="3799093"/>
+            <a:ext cx="1714739" cy="1714739"/>
+          </a:xfrm>
+          <a:prstGeom prst="rect">
+            <a:avLst/>
+          </a:prstGeom>
+        </p:spPr>
+      </p:pic>
     </p:spTree>
   </p:cSld>
   <p:clrMapOvr>

--- a/slides-1-first-photo.pptx
+++ b/slides-1-first-photo.pptx
@@ -3851,7 +3851,7 @@
               </a:rPr>
               <a:t>照片放大實驗</a:t>
             </a:r>
-            <a:endParaRPr lang="en-US" altLang="zh-TW" sz="2000" b="1" smtClean="0">
+            <a:endParaRPr lang="en-US" altLang="zh-TW" sz="2000" b="1" dirty="0" smtClean="0">
               <a:solidFill>
                 <a:srgbClr val="5EC8F2"/>
               </a:solidFill>
@@ -3868,7 +3868,7 @@
               <a:buNone/>
             </a:pPr>
             <a:r>
-              <a:rPr lang="en-US" sz="1600" smtClean="0">
+              <a:rPr lang="en-US" sz="1600" dirty="0" err="1" smtClean="0">
                 <a:solidFill>
                   <a:srgbClr val="C9D6E8"/>
                 </a:solidFill>
